--- a/doc/demos/presentation-demo.pptx
+++ b/doc/demos/presentation-demo.pptx
@@ -11,10 +11,215 @@
     <p:sldId id="256" r:id="s0"/>
     <p:sldId id="257" r:id="s1"/>
     <p:sldId id="258" r:id="s2"/>
+    <p:sldId id="259" r:id="s3"/>
   </p:sldIdLst>
   <p:sldSz cx="9144000" cy="5143500"/>
   <p:notesSz cx="6858000" cy="9144000"/>
 </p:presentation>
+</file>
+
+<file path=ppt/charts/chart1.xml><?xml version="1.0" encoding="utf-8"?>
+<c:chartSpace xmlns:c="http://schemas.openxmlformats.org/drawingml/2006/chart" xmlns:a="http://schemas.openxmlformats.org/drawingml/2006/main" xmlns:r="http://schemas.openxmlformats.org/officeDocument/2006/relationships">
+  <c:lang val="zh-CN"/>
+  <c:chart>
+    <c:title>
+      <c:tx>
+        <c:rich>
+          <a:bodyPr/>
+          <a:lstStyle/>
+          <a:p>
+            <a:r>
+              <a:t>季度数据</a:t>
+            </a:r>
+          </a:p>
+        </c:rich>
+      </c:tx>
+      <c:overlay val="0"/>
+    </c:title>
+    <c:autoTitleDeleted val="0"/>
+    <c:plotArea>
+      <c:layout/>
+      <c:barChart>
+        <c:barDir val="col"/>
+        <c:grouping val="clustered"/>
+        <c:varyColors val="0"/>
+        <c:ser>
+          <c:idx val="0"/>
+          <c:order val="0"/>
+          <c:tx>
+            <c:strRef>
+              <c:f>Sheet1!$B$1</c:f>
+              <c:strCache>
+                <c:ptCount val="1"/>
+                <c:pt idx="0">
+                  <c:v>系列 1</c:v>
+                </c:pt>
+              </c:strCache>
+            </c:strRef>
+          </c:tx>
+          <c:spPr>
+            <a:solidFill>
+              <a:srgbClr val="246b50"/>
+            </a:solidFill>
+            <a:ln w="19050">
+              <a:solidFill>
+                <a:srgbClr val="246b50"/>
+              </a:solidFill>
+            </a:ln>
+          </c:spPr>
+          <c:cat>
+            <c:strRef>
+              <c:f>Sheet1!$A$2:$A$4</c:f>
+              <c:strCache>
+                <c:ptCount val="3"/>
+                <c:pt idx="0">
+                  <c:v>第一季度</c:v>
+                </c:pt>
+                <c:pt idx="1">
+                  <c:v>第二季度</c:v>
+                </c:pt>
+                <c:pt idx="2">
+                  <c:v>第三季度</c:v>
+                </c:pt>
+              </c:strCache>
+            </c:strRef>
+          </c:cat>
+          <c:val>
+            <c:numRef>
+              <c:f>Sheet1!$B$2:$B$4</c:f>
+              <c:numCache>
+                <c:formatCode>General</c:formatCode>
+                <c:ptCount val="3"/>
+                <c:pt idx="0">
+                  <c:v>12</c:v>
+                </c:pt>
+                <c:pt idx="1">
+                  <c:v>18</c:v>
+                </c:pt>
+                <c:pt idx="2">
+                  <c:v>15</c:v>
+                </c:pt>
+              </c:numCache>
+            </c:numRef>
+          </c:val>
+        </c:ser>
+        <c:ser>
+          <c:idx val="1"/>
+          <c:order val="1"/>
+          <c:tx>
+            <c:strRef>
+              <c:f>Sheet1!$C$1</c:f>
+              <c:strCache>
+                <c:ptCount val="1"/>
+                <c:pt idx="0">
+                  <c:v>系列 2</c:v>
+                </c:pt>
+              </c:strCache>
+            </c:strRef>
+          </c:tx>
+          <c:spPr>
+            <a:solidFill>
+              <a:srgbClr val="6298c9"/>
+            </a:solidFill>
+            <a:ln w="19050">
+              <a:solidFill>
+                <a:srgbClr val="6298c9"/>
+              </a:solidFill>
+            </a:ln>
+          </c:spPr>
+          <c:cat>
+            <c:strRef>
+              <c:f>Sheet1!$A$2:$A$4</c:f>
+              <c:strCache>
+                <c:ptCount val="3"/>
+                <c:pt idx="0">
+                  <c:v>第一季度</c:v>
+                </c:pt>
+                <c:pt idx="1">
+                  <c:v>第二季度</c:v>
+                </c:pt>
+                <c:pt idx="2">
+                  <c:v>第三季度</c:v>
+                </c:pt>
+              </c:strCache>
+            </c:strRef>
+          </c:cat>
+          <c:val>
+            <c:numRef>
+              <c:f>Sheet1!$C$2:$C$4</c:f>
+              <c:numCache>
+                <c:formatCode>General</c:formatCode>
+                <c:ptCount val="3"/>
+                <c:pt idx="0">
+                  <c:v>8</c:v>
+                </c:pt>
+                <c:pt idx="1">
+                  <c:v>14</c:v>
+                </c:pt>
+                <c:pt idx="2">
+                  <c:v>20</c:v>
+                </c:pt>
+              </c:numCache>
+            </c:numRef>
+          </c:val>
+        </c:ser>
+        <c:dLbls>
+          <c:showLegendKey val="0"/>
+          <c:showVal val="0"/>
+          <c:showCatName val="0"/>
+          <c:showSerName val="0"/>
+          <c:showPercent val="0"/>
+          <c:showBubbleSize val="0"/>
+        </c:dLbls>
+        <c:gapWidth val="150"/>
+        <c:overlap val="0"/>
+        <c:axId val="123"/>
+        <c:axId val="456"/>
+      </c:barChart>
+      <c:catAx>
+        <c:axId val="123"/>
+        <c:scaling>
+          <c:orientation val="minMax"/>
+        </c:scaling>
+        <c:delete val="0"/>
+        <c:axPos val="b"/>
+        <c:numFmt formatCode="General" sourceLinked="1"/>
+        <c:majorTickMark val="none"/>
+        <c:minorTickMark val="none"/>
+        <c:tickLblPos val="nextTo"/>
+        <c:crossAx val="456"/>
+        <c:crosses val="autoZero"/>
+        <c:auto val="1"/>
+        <c:lblAlgn val="ctr"/>
+        <c:lblOffset val="100"/>
+      </c:catAx>
+      <c:valAx>
+        <c:axId val="456"/>
+        <c:scaling>
+          <c:orientation val="minMax"/>
+        </c:scaling>
+        <c:delete val="0"/>
+        <c:axPos val="l"/>
+        <c:numFmt formatCode="General" sourceLinked="1"/>
+        <c:majorTickMark val="none"/>
+        <c:minorTickMark val="none"/>
+        <c:tickLblPos val="nextTo"/>
+        <c:crossAx val="123"/>
+        <c:crosses val="autoZero"/>
+        <c:crossBetween val="between"/>
+      </c:valAx>
+    </c:plotArea>
+    <c:legend>
+      <c:legendPos val="b"/>
+      <c:overlay val="0"/>
+    </c:legend>
+    <c:plotVisOnly val="1"/>
+    <c:dispBlanksAs val="gap"/>
+  </c:chart>
+  <c:externalData r:id="data">
+    <c:autoUpdate val="0"/>
+  </c:externalData>
+</c:chartSpace>
 </file>
 
 <file path=ppt/notesMasters/notesMaster1.xml><?xml version="1.0" encoding="utf-8"?>
@@ -235,6 +440,64 @@
                 <a:ea typeface="Arial"/>
               </a:rPr>
               <a:t xml:space="preserve">表格包含三行三列。可在编辑面板修改文字、行列与统一样式；导出 PDF 为最终静态画面。</a:t>
+            </a:r>
+            <a:endParaRPr lang="zh-CN"/>
+          </a:p>
+        </p:txBody>
+      </p:sp>
+    </p:spTree>
+  </p:cSld>
+  <p:clrMapOvr>
+    <a:masterClrMapping/>
+  </p:clrMapOvr>
+</p:notes>
+</file>
+
+<file path=ppt/notesSlides/notesSlide4.xml><?xml version="1.0" encoding="utf-8"?>
+<p:notes xmlns:a="http://schemas.openxmlformats.org/drawingml/2006/main" xmlns:r="http://schemas.openxmlformats.org/officeDocument/2006/relationships" xmlns:p="http://schemas.openxmlformats.org/presentationml/2006/main">
+  <p:cSld>
+    <p:spTree>
+      <p:nvGrpSpPr>
+        <p:cNvPr id="1" name=""/>
+        <p:cNvGrpSpPr/>
+        <p:nvPr/>
+      </p:nvGrpSpPr>
+      <p:grpSpPr>
+        <a:xfrm>
+          <a:off x="0" y="0"/>
+          <a:ext cx="0" cy="0"/>
+          <a:chOff x="0" y="0"/>
+          <a:chExt cx="0" cy="0"/>
+        </a:xfrm>
+      </p:grpSpPr>
+      <p:sp>
+        <p:nvSpPr>
+          <p:cNvPr id="2" name="Speaker Notes"/>
+          <p:cNvSpPr txBox="1"/>
+          <p:nvPr>
+            <p:ph type="body" idx="1"/>
+          </p:nvPr>
+        </p:nvSpPr>
+        <p:spPr>
+          <a:xfrm>
+            <a:off x="685800" y="4114800"/>
+            <a:ext cx="5486400" cy="4114800"/>
+          </a:xfrm>
+        </p:spPr>
+        <p:txBody>
+          <a:bodyPr wrap="square" lIns="38100" tIns="38100" rIns="38100" bIns="38100"/>
+          <a:lstStyle/>
+          <a:p>
+            <a:pPr algn="l"/>
+            <a:r>
+              <a:rPr lang="zh-CN" sz="1200" b="0" i="0" u="none">
+                <a:solidFill>
+                  <a:srgbClr val="000000"/>
+                </a:solidFill>
+                <a:latin typeface="Arial"/>
+                <a:ea typeface="Arial"/>
+              </a:rPr>
+              <a:t xml:space="preserve">双击图表进入编辑，可修改标题、类型、系列和数值；下载的 PPTX 保留原生图表与 Excel 数据。</a:t>
             </a:r>
             <a:endParaRPr lang="zh-CN"/>
           </a:p>
@@ -1806,6 +2069,166 @@
 </p:sld>
 </file>
 
+<file path=ppt/slides/slide4.xml><?xml version="1.0" encoding="utf-8"?>
+<p:sld xmlns:a="http://schemas.openxmlformats.org/drawingml/2006/main" xmlns:r="http://schemas.openxmlformats.org/officeDocument/2006/relationships" xmlns:p="http://schemas.openxmlformats.org/presentationml/2006/main">
+  <p:cSld>
+    <p:bg>
+      <p:bgPr>
+        <a:solidFill>
+          <a:srgbClr val="f5faf7"/>
+        </a:solidFill>
+        <a:effectLst/>
+      </p:bgPr>
+    </p:bg>
+    <p:spTree>
+      <p:nvGrpSpPr>
+        <p:cNvPr id="1" name=""/>
+        <p:cNvGrpSpPr/>
+        <p:nvPr/>
+      </p:nvGrpSpPr>
+      <p:grpSpPr>
+        <a:xfrm>
+          <a:off x="0" y="0"/>
+          <a:ext cx="0" cy="0"/>
+          <a:chOff x="0" y="0"/>
+          <a:chExt cx="0" cy="0"/>
+        </a:xfrm>
+      </p:grpSpPr>
+      <p:sp>
+        <p:nvSpPr>
+          <p:cNvPr id="2" name="Object 2"/>
+          <p:cNvSpPr txBox="1"/>
+          <p:nvPr/>
+        </p:nvSpPr>
+        <p:spPr>
+          <a:xfrm rot="0">
+            <a:off x="571500" y="619125"/>
+            <a:ext cx="7810500" cy="714375"/>
+          </a:xfrm>
+          <a:prstGeom prst="rect">
+            <a:avLst/>
+          </a:prstGeom>
+          <a:noFill/>
+          <a:ln w="9525">
+            <a:noFill/>
+          </a:ln>
+        </p:spPr>
+        <p:txBody>
+          <a:bodyPr wrap="square" lIns="38100" tIns="38100" rIns="38100" bIns="38100"/>
+          <a:lstStyle/>
+          <a:p>
+            <a:pPr algn="l"/>
+            <a:r>
+              <a:rPr lang="zh-CN" sz="3150" b="1" i="0" u="none">
+                <a:solidFill>
+                  <a:srgbClr val="203c35"/>
+                </a:solidFill>
+                <a:latin typeface="Arial"/>
+                <a:ea typeface="Arial"/>
+              </a:rPr>
+              <a:t xml:space="preserve">图表数据，可以直接编辑</a:t>
+            </a:r>
+            <a:endParaRPr lang="zh-CN"/>
+          </a:p>
+        </p:txBody>
+      </p:sp>
+      <p:graphicFrame>
+        <p:nvGraphicFramePr>
+          <p:cNvPr id="3" name="Object 3"/>
+          <p:cNvGraphicFramePr/>
+          <p:nvPr/>
+        </p:nvGraphicFramePr>
+        <p:xfrm rot="0">
+          <a:off x="619125" y="1476375"/>
+          <a:ext cx="7905750" cy="3143250"/>
+        </p:xfrm>
+        <a:graphic>
+          <a:graphicData uri="http://schemas.openxmlformats.org/drawingml/2006/chart">
+            <c:chart xmlns:c="http://schemas.openxmlformats.org/drawingml/2006/chart" r:id="chart1"/>
+          </a:graphicData>
+        </a:graphic>
+      </p:graphicFrame>
+    </p:spTree>
+  </p:cSld>
+  <p:clrMapOvr>
+    <a:masterClrMapping/>
+  </p:clrMapOvr>
+  <p:transition spd="med" advClick="1">
+    <p:fade/>
+  </p:transition>
+  <p:timing>
+    <p:tnLst>
+      <p:par>
+        <p:cTn id="1" dur="indefinite" restart="never" nodeType="tmRoot">
+          <p:childTnLst>
+            <p:seq concurrent="1" nextAc="seek">
+              <p:cTn id="2" dur="indefinite" nodeType="mainSeq">
+                <p:childTnLst>
+                  <p:par>
+                    <p:cTn id="3" fill="hold">
+                      <p:stCondLst>
+                        <p:cond delay="0"/>
+                      </p:stCondLst>
+                      <p:childTnLst>
+                        <p:par>
+                          <p:cTn id="4" presetID="10" presetClass="entr" presetSubtype="0" fill="hold" nodeType="withEffect">
+                            <p:stCondLst>
+                              <p:cond delay="0"/>
+                            </p:stCondLst>
+                            <p:childTnLst>
+                              <p:set>
+                                <p:cBhvr>
+                                  <p:cTn id="6" dur="1" fill="hold"/>
+                                  <p:tgtEl>
+                                    <p:spTgt spid="3"/>
+                                  </p:tgtEl>
+                                  <p:attrNameLst>
+                                    <p:attrName>style.visibility</p:attrName>
+                                  </p:attrNameLst>
+                                </p:cBhvr>
+                                <p:to>
+                                  <p:strVal val="visible"/>
+                                </p:to>
+                              </p:set>
+                              <p:animEffect transition="in" filter="fade">
+                                <p:cBhvr>
+                                  <p:cTn id="5" dur="500" fill="hold"/>
+                                  <p:tgtEl>
+                                    <p:spTgt spid="3"/>
+                                  </p:tgtEl>
+                                </p:cBhvr>
+                              </p:animEffect>
+                            </p:childTnLst>
+                          </p:cTn>
+                        </p:par>
+                      </p:childTnLst>
+                    </p:cTn>
+                  </p:par>
+                </p:childTnLst>
+              </p:cTn>
+              <p:prevCondLst>
+                <p:cond evt="onPrev" delay="0">
+                  <p:tgtEl>
+                    <p:sldTgt/>
+                  </p:tgtEl>
+                </p:cond>
+              </p:prevCondLst>
+              <p:nextCondLst>
+                <p:cond evt="onNext" delay="0">
+                  <p:tgtEl>
+                    <p:sldTgt/>
+                  </p:tgtEl>
+                </p:cond>
+              </p:nextCondLst>
+            </p:seq>
+          </p:childTnLst>
+        </p:cTn>
+      </p:par>
+    </p:tnLst>
+  </p:timing>
+</p:sld>
+</file>
+
 <file path=ppt/theme/theme1.xml><?xml version="1.0" encoding="utf-8"?>
 <a:theme xmlns:a="http://schemas.openxmlformats.org/drawingml/2006/main" name="Document Studio">
   <a:themeElements>
